--- a/19/1 Excel/VbaMacro/01 Introduction/Introduction to VBA.pptx
+++ b/19/1 Excel/VbaMacro/01 Introduction/Introduction to VBA.pptx
@@ -245,7 +245,7 @@
           <a:p>
             <a:fld id="{02CA44AF-341C-4892-844F-8512CFE94523}" type="datetimeFigureOut">
               <a:rPr lang="en-IN" smtClean="0"/>
-              <a:t>11-12-2024</a:t>
+              <a:t>09-07-2026</a:t>
             </a:fld>
             <a:endParaRPr lang="en-IN"/>
           </a:p>
@@ -415,7 +415,7 @@
           <a:p>
             <a:fld id="{02CA44AF-341C-4892-844F-8512CFE94523}" type="datetimeFigureOut">
               <a:rPr lang="en-IN" smtClean="0"/>
-              <a:t>11-12-2024</a:t>
+              <a:t>09-07-2026</a:t>
             </a:fld>
             <a:endParaRPr lang="en-IN"/>
           </a:p>
@@ -595,7 +595,7 @@
           <a:p>
             <a:fld id="{02CA44AF-341C-4892-844F-8512CFE94523}" type="datetimeFigureOut">
               <a:rPr lang="en-IN" smtClean="0"/>
-              <a:t>11-12-2024</a:t>
+              <a:t>09-07-2026</a:t>
             </a:fld>
             <a:endParaRPr lang="en-IN"/>
           </a:p>
@@ -765,7 +765,7 @@
           <a:p>
             <a:fld id="{02CA44AF-341C-4892-844F-8512CFE94523}" type="datetimeFigureOut">
               <a:rPr lang="en-IN" smtClean="0"/>
-              <a:t>11-12-2024</a:t>
+              <a:t>09-07-2026</a:t>
             </a:fld>
             <a:endParaRPr lang="en-IN"/>
           </a:p>
@@ -1011,7 +1011,7 @@
           <a:p>
             <a:fld id="{02CA44AF-341C-4892-844F-8512CFE94523}" type="datetimeFigureOut">
               <a:rPr lang="en-IN" smtClean="0"/>
-              <a:t>11-12-2024</a:t>
+              <a:t>09-07-2026</a:t>
             </a:fld>
             <a:endParaRPr lang="en-IN"/>
           </a:p>
@@ -1243,7 +1243,7 @@
           <a:p>
             <a:fld id="{02CA44AF-341C-4892-844F-8512CFE94523}" type="datetimeFigureOut">
               <a:rPr lang="en-IN" smtClean="0"/>
-              <a:t>11-12-2024</a:t>
+              <a:t>09-07-2026</a:t>
             </a:fld>
             <a:endParaRPr lang="en-IN"/>
           </a:p>
@@ -1610,7 +1610,7 @@
           <a:p>
             <a:fld id="{02CA44AF-341C-4892-844F-8512CFE94523}" type="datetimeFigureOut">
               <a:rPr lang="en-IN" smtClean="0"/>
-              <a:t>11-12-2024</a:t>
+              <a:t>09-07-2026</a:t>
             </a:fld>
             <a:endParaRPr lang="en-IN"/>
           </a:p>
@@ -1728,7 +1728,7 @@
           <a:p>
             <a:fld id="{02CA44AF-341C-4892-844F-8512CFE94523}" type="datetimeFigureOut">
               <a:rPr lang="en-IN" smtClean="0"/>
-              <a:t>11-12-2024</a:t>
+              <a:t>09-07-2026</a:t>
             </a:fld>
             <a:endParaRPr lang="en-IN"/>
           </a:p>
@@ -1823,7 +1823,7 @@
           <a:p>
             <a:fld id="{02CA44AF-341C-4892-844F-8512CFE94523}" type="datetimeFigureOut">
               <a:rPr lang="en-IN" smtClean="0"/>
-              <a:t>11-12-2024</a:t>
+              <a:t>09-07-2026</a:t>
             </a:fld>
             <a:endParaRPr lang="en-IN"/>
           </a:p>
@@ -2100,7 +2100,7 @@
           <a:p>
             <a:fld id="{02CA44AF-341C-4892-844F-8512CFE94523}" type="datetimeFigureOut">
               <a:rPr lang="en-IN" smtClean="0"/>
-              <a:t>11-12-2024</a:t>
+              <a:t>09-07-2026</a:t>
             </a:fld>
             <a:endParaRPr lang="en-IN"/>
           </a:p>
@@ -2353,7 +2353,7 @@
           <a:p>
             <a:fld id="{02CA44AF-341C-4892-844F-8512CFE94523}" type="datetimeFigureOut">
               <a:rPr lang="en-IN" smtClean="0"/>
-              <a:t>11-12-2024</a:t>
+              <a:t>09-07-2026</a:t>
             </a:fld>
             <a:endParaRPr lang="en-IN"/>
           </a:p>
@@ -2566,7 +2566,7 @@
           <a:p>
             <a:fld id="{02CA44AF-341C-4892-844F-8512CFE94523}" type="datetimeFigureOut">
               <a:rPr lang="en-IN" smtClean="0"/>
-              <a:t>11-12-2024</a:t>
+              <a:t>09-07-2026</a:t>
             </a:fld>
             <a:endParaRPr lang="en-IN"/>
           </a:p>
@@ -3013,7 +3013,7 @@
         <p:spPr>
           <a:xfrm>
             <a:off x="512618" y="1512606"/>
-            <a:ext cx="8455891" cy="2308324"/>
+            <a:ext cx="8455891" cy="2862322"/>
           </a:xfrm>
           <a:prstGeom prst="rect">
             <a:avLst/>
@@ -3029,7 +3029,19 @@
               <a:rPr lang="en-US" dirty="0" smtClean="0">
                 <a:latin typeface="Candara" panose="020E0502030303020204" pitchFamily="34" charset="0"/>
               </a:rPr>
-              <a:t>VBA : is an Object Based and Even Driven programming Language</a:t>
+              <a:t>VBA : is an Object Based </a:t>
+            </a:r>
+            <a:r>
+              <a:rPr lang="en-US" dirty="0" smtClean="0">
+                <a:latin typeface="Candara" panose="020E0502030303020204" pitchFamily="34" charset="0"/>
+              </a:rPr>
+              <a:t>programming </a:t>
+            </a:r>
+            <a:r>
+              <a:rPr lang="en-US" dirty="0" smtClean="0">
+                <a:latin typeface="Candara" panose="020E0502030303020204" pitchFamily="34" charset="0"/>
+              </a:rPr>
+              <a:t>Language</a:t>
             </a:r>
           </a:p>
           <a:p>
@@ -3097,7 +3109,12 @@
             </a:r>
           </a:p>
           <a:p>
-            <a:pPr marL="285750" indent="-285750">
+            <a:endParaRPr lang="en-US" dirty="0" smtClean="0">
+              <a:latin typeface="Candara" panose="020E0502030303020204" pitchFamily="34" charset="0"/>
+            </a:endParaRPr>
+          </a:p>
+          <a:p>
+            <a:pPr marL="742950" lvl="1" indent="-285750">
               <a:buFont typeface="Wingdings" panose="05000000000000000000" pitchFamily="2" charset="2"/>
               <a:buChar char="§"/>
             </a:pPr>
@@ -3107,6 +3124,18 @@
               </a:rPr>
               <a:t>PivotTable</a:t>
             </a:r>
+          </a:p>
+          <a:p>
+            <a:pPr marL="742950" lvl="1" indent="-285750">
+              <a:buFont typeface="Wingdings" panose="05000000000000000000" pitchFamily="2" charset="2"/>
+              <a:buChar char="§"/>
+            </a:pPr>
+            <a:r>
+              <a:rPr lang="en-US" dirty="0" smtClean="0">
+                <a:latin typeface="Candara" panose="020E0502030303020204" pitchFamily="34" charset="0"/>
+              </a:rPr>
+              <a:t>Tables</a:t>
+            </a:r>
             <a:endParaRPr lang="en-IN" dirty="0">
               <a:latin typeface="Candara" panose="020E0502030303020204" pitchFamily="34" charset="0"/>
             </a:endParaRPr>
@@ -3121,7 +3150,7 @@
         </p:nvSpPr>
         <p:spPr>
           <a:xfrm>
-            <a:off x="341745" y="4239491"/>
+            <a:off x="341745" y="4528740"/>
             <a:ext cx="4184073" cy="923330"/>
           </a:xfrm>
           <a:prstGeom prst="rect">
@@ -3187,7 +3216,7 @@
         <p:spPr>
           <a:xfrm>
             <a:off x="138544" y="594004"/>
-            <a:ext cx="10446327" cy="2308324"/>
+            <a:ext cx="10446327" cy="2585323"/>
           </a:xfrm>
           <a:prstGeom prst="rect">
             <a:avLst/>
@@ -3220,8 +3249,19 @@
               <a:rPr lang="en-US" dirty="0" smtClean="0">
                 <a:latin typeface="Candara" panose="020E0502030303020204" pitchFamily="34" charset="0"/>
               </a:rPr>
-              <a:t>A macro is a recorded sequence of actions in an Office app (Excel, Word, etc.) that automates repetitive tasks. It’s created through the "Record Macro" feature and requires no programming knowledge. Macros can be simple but are limited in functionality.</a:t>
-            </a:r>
+              <a:t>	A </a:t>
+            </a:r>
+            <a:r>
+              <a:rPr lang="en-US" dirty="0" smtClean="0">
+                <a:latin typeface="Candara" panose="020E0502030303020204" pitchFamily="34" charset="0"/>
+              </a:rPr>
+              <a:t>macro is a recorded sequence of actions in an Office app (Excel, Word, etc.) that automates repetitive tasks. It’s created through the "Record Macro" feature and requires no programming knowledge. Macros can be simple but are limited in functionality.</a:t>
+            </a:r>
+          </a:p>
+          <a:p>
+            <a:endParaRPr lang="en-US" b="1" dirty="0" smtClean="0">
+              <a:latin typeface="Candara" panose="020E0502030303020204" pitchFamily="34" charset="0"/>
+            </a:endParaRPr>
           </a:p>
           <a:p>
             <a:r>
@@ -3245,7 +3285,13 @@
               <a:rPr lang="en-US" dirty="0" smtClean="0">
                 <a:latin typeface="Candara" panose="020E0502030303020204" pitchFamily="34" charset="0"/>
               </a:rPr>
-              <a:t>VBA (Visual Basic for Applications) is a programming language used to write macros and create custom automation in Office applications. It provides greater flexibility, enabling complex logic, loops, and interaction with other software. VBA requires coding knowledge.</a:t>
+              <a:t>	VBA </a:t>
+            </a:r>
+            <a:r>
+              <a:rPr lang="en-US" dirty="0" smtClean="0">
+                <a:latin typeface="Candara" panose="020E0502030303020204" pitchFamily="34" charset="0"/>
+              </a:rPr>
+              <a:t>(Visual Basic for Applications) is a programming language used to write macros and create custom automation in Office applications. It provides greater flexibility, enabling complex logic, loops, and interaction with other software. VBA requires coding knowledge.</a:t>
             </a:r>
             <a:endParaRPr lang="en-US" dirty="0">
               <a:latin typeface="Candara" panose="020E0502030303020204" pitchFamily="34" charset="0"/>
